--- a/ppts/FSE2025CAShift.pptx
+++ b/ppts/FSE2025CAShift.pptx
@@ -3764,7 +3764,7 @@
         </p:nvSpPr>
         <p:spPr>
           <a:xfrm>
-            <a:off x="396597" y="5505896"/>
+            <a:off x="383706" y="5555757"/>
             <a:ext cx="11398805" cy="935677"/>
           </a:xfrm>
           <a:prstGeom prst="rect">
@@ -4118,7 +4118,7 @@
         </p:nvSpPr>
         <p:spPr>
           <a:xfrm>
-            <a:off x="460000" y="6453334"/>
+            <a:off x="440950" y="6491434"/>
             <a:ext cx="11398805" cy="307777"/>
           </a:xfrm>
           <a:prstGeom prst="rect">
@@ -4250,316 +4250,6 @@
               <a:latin typeface="Arial"/>
               <a:ea typeface="黑体" panose="02010609060101010101" charset="-122"/>
             </a:endParaRPr>
-          </a:p>
-        </p:txBody>
-      </p:sp>
-      <p:pic>
-        <p:nvPicPr>
-          <p:cNvPr id="3" name="Google Shape;593;g361dea98e73_0_106">
-            <a:extLst>
-              <a:ext uri="{FF2B5EF4-FFF2-40B4-BE49-F238E27FC236}">
-                <a16:creationId xmlns:a16="http://schemas.microsoft.com/office/drawing/2014/main" id="{ED4B9626-35D8-6940-4834-50173A81AE8D}"/>
-              </a:ext>
-            </a:extLst>
-          </p:cNvPr>
-          <p:cNvPicPr preferRelativeResize="0"/>
-          <p:nvPr/>
-        </p:nvPicPr>
-        <p:blipFill rotWithShape="1">
-          <a:blip r:embed="rId4">
-            <a:alphaModFix/>
-          </a:blip>
-          <a:srcRect r="-163" b="14681"/>
-          <a:stretch/>
-        </p:blipFill>
-        <p:spPr>
-          <a:xfrm>
-            <a:off x="460000" y="2365141"/>
-            <a:ext cx="7373374" cy="3057561"/>
-          </a:xfrm>
-          <a:prstGeom prst="rect">
-            <a:avLst/>
-          </a:prstGeom>
-          <a:noFill/>
-          <a:ln>
-            <a:noFill/>
-          </a:ln>
-        </p:spPr>
-      </p:pic>
-      <p:pic>
-        <p:nvPicPr>
-          <p:cNvPr id="4" name="Google Shape;711;g361dea98e73_0_135">
-            <a:extLst>
-              <a:ext uri="{FF2B5EF4-FFF2-40B4-BE49-F238E27FC236}">
-                <a16:creationId xmlns:a16="http://schemas.microsoft.com/office/drawing/2014/main" id="{6EE22E53-312E-593D-D552-8F155236F6C8}"/>
-              </a:ext>
-            </a:extLst>
-          </p:cNvPr>
-          <p:cNvPicPr preferRelativeResize="0"/>
-          <p:nvPr/>
-        </p:nvPicPr>
-        <p:blipFill rotWithShape="1">
-          <a:blip r:embed="rId5">
-            <a:alphaModFix/>
-          </a:blip>
-          <a:srcRect/>
-          <a:stretch/>
-        </p:blipFill>
-        <p:spPr>
-          <a:xfrm>
-            <a:off x="8037648" y="2638293"/>
-            <a:ext cx="2606952" cy="2618318"/>
-          </a:xfrm>
-          <a:prstGeom prst="rect">
-            <a:avLst/>
-          </a:prstGeom>
-          <a:noFill/>
-          <a:ln w="19050" cap="flat" cmpd="sng">
-            <a:solidFill>
-              <a:srgbClr val="7F7F7F"/>
-            </a:solidFill>
-            <a:prstDash val="solid"/>
-            <a:round/>
-            <a:headEnd type="none" w="sm" len="sm"/>
-            <a:tailEnd type="none" w="sm" len="sm"/>
-          </a:ln>
-        </p:spPr>
-      </p:pic>
-      <p:sp>
-        <p:nvSpPr>
-          <p:cNvPr id="5" name="文本框 19">
-            <a:extLst>
-              <a:ext uri="{FF2B5EF4-FFF2-40B4-BE49-F238E27FC236}">
-                <a16:creationId xmlns:a16="http://schemas.microsoft.com/office/drawing/2014/main" id="{EEE8A0DC-45BF-A9AF-3F8F-80A95BAF6BB9}"/>
-              </a:ext>
-            </a:extLst>
-          </p:cNvPr>
-          <p:cNvSpPr txBox="1"/>
-          <p:nvPr/>
-        </p:nvSpPr>
-        <p:spPr>
-          <a:xfrm>
-            <a:off x="10712248" y="2547069"/>
-            <a:ext cx="727176" cy="2800767"/>
-          </a:xfrm>
-          <a:prstGeom prst="rect">
-            <a:avLst/>
-          </a:prstGeom>
-          <a:noFill/>
-        </p:spPr>
-        <p:txBody>
-          <a:bodyPr wrap="square">
-            <a:spAutoFit/>
-          </a:bodyPr>
-          <a:lstStyle/>
-          <a:p>
-            <a:pPr algn="ctr"/>
-            <a:r>
-              <a:rPr lang="zh-CN" altLang="en-US" sz="1600" b="1" dirty="0">
-                <a:solidFill>
-                  <a:prstClr val="black"/>
-                </a:solidFill>
-                <a:latin typeface="微软雅黑" panose="020B0503020204020204" charset="-122"/>
-                <a:ea typeface="微软雅黑" panose="020B0503020204020204" charset="-122"/>
-              </a:rPr>
-              <a:t>云系统日志在不同的漂移场景下呈现显著分布差异</a:t>
-            </a:r>
-          </a:p>
-        </p:txBody>
-      </p:sp>
-      <p:sp>
-        <p:nvSpPr>
-          <p:cNvPr id="13" name="矩形: 圆角 28">
-            <a:extLst>
-              <a:ext uri="{FF2B5EF4-FFF2-40B4-BE49-F238E27FC236}">
-                <a16:creationId xmlns:a16="http://schemas.microsoft.com/office/drawing/2014/main" id="{0F0D9322-354A-4870-A3DA-B02281DF8F58}"/>
-              </a:ext>
-            </a:extLst>
-          </p:cNvPr>
-          <p:cNvSpPr/>
-          <p:nvPr/>
-        </p:nvSpPr>
-        <p:spPr>
-          <a:xfrm>
-            <a:off x="345874" y="1432180"/>
-            <a:ext cx="11512931" cy="956829"/>
-          </a:xfrm>
-          <a:prstGeom prst="roundRect">
-            <a:avLst>
-              <a:gd name="adj" fmla="val 3558"/>
-            </a:avLst>
-          </a:prstGeom>
-          <a:solidFill>
-            <a:sysClr val="window" lastClr="FFFFFF"/>
-          </a:solidFill>
-          <a:ln w="6350" cap="flat" cmpd="sng" algn="ctr">
-            <a:solidFill>
-              <a:srgbClr val="003399">
-                <a:alpha val="28000"/>
-              </a:srgbClr>
-            </a:solidFill>
-            <a:prstDash val="solid"/>
-            <a:miter lim="800000"/>
-          </a:ln>
-          <a:effectLst>
-            <a:outerShdw blurRad="203200" dist="88900" dir="5400000" sx="96000" sy="96000" algn="t" rotWithShape="0">
-              <a:srgbClr val="003399">
-                <a:alpha val="23000"/>
-              </a:srgbClr>
-            </a:outerShdw>
-          </a:effectLst>
-        </p:spPr>
-        <p:txBody>
-          <a:bodyPr rtlCol="0" anchor="ctr"/>
-          <a:lstStyle/>
-          <a:p>
-            <a:pPr marL="0" marR="0" lvl="0" indent="0" algn="ctr" defTabSz="914400" eaLnBrk="1" fontAlgn="auto" latinLnBrk="0" hangingPunct="1">
-              <a:lnSpc>
-                <a:spcPct val="100000"/>
-              </a:lnSpc>
-              <a:spcBef>
-                <a:spcPts val="0"/>
-              </a:spcBef>
-              <a:spcAft>
-                <a:spcPts val="0"/>
-              </a:spcAft>
-              <a:buClrTx/>
-              <a:buSzTx/>
-              <a:buFontTx/>
-              <a:buNone/>
-              <a:tabLst/>
-              <a:defRPr/>
-            </a:pPr>
-            <a:endParaRPr kumimoji="0" lang="zh-CN" altLang="en-US" sz="1350" b="0" i="0" u="none" strike="noStrike" kern="0" cap="none" spc="0" normalizeH="0" baseline="0" noProof="0" dirty="0">
-              <a:ln>
-                <a:noFill/>
-              </a:ln>
-              <a:solidFill>
-                <a:prstClr val="white"/>
-              </a:solidFill>
-              <a:effectLst/>
-              <a:uLnTx/>
-              <a:uFillTx/>
-              <a:latin typeface="Roboto"/>
-              <a:ea typeface="思源黑体 CN Regular"/>
-              <a:cs typeface="+mn-cs"/>
-            </a:endParaRPr>
-          </a:p>
-        </p:txBody>
-      </p:sp>
-      <p:sp>
-        <p:nvSpPr>
-          <p:cNvPr id="14" name="文本框 7">
-            <a:extLst>
-              <a:ext uri="{FF2B5EF4-FFF2-40B4-BE49-F238E27FC236}">
-                <a16:creationId xmlns:a16="http://schemas.microsoft.com/office/drawing/2014/main" id="{88C49DF7-ABD8-45EA-B60D-BE4AA5AB5762}"/>
-              </a:ext>
-            </a:extLst>
-          </p:cNvPr>
-          <p:cNvSpPr txBox="1"/>
-          <p:nvPr/>
-        </p:nvSpPr>
-        <p:spPr>
-          <a:xfrm>
-            <a:off x="522339" y="1510773"/>
-            <a:ext cx="11160000" cy="799706"/>
-          </a:xfrm>
-          <a:prstGeom prst="rect">
-            <a:avLst/>
-          </a:prstGeom>
-          <a:noFill/>
-        </p:spPr>
-        <p:txBody>
-          <a:bodyPr wrap="square">
-            <a:spAutoFit/>
-          </a:bodyPr>
-          <a:lstStyle>
-            <a:defPPr>
-              <a:defRPr lang="en-US"/>
-            </a:defPPr>
-            <a:lvl1pPr marL="342900" indent="-342900">
-              <a:buFont typeface="Wingdings" panose="05000000000000000000" pitchFamily="2" charset="2"/>
-              <a:buChar char="Ø"/>
-              <a:defRPr sz="2000" b="1">
-                <a:solidFill>
-                  <a:srgbClr val="2E8DBB"/>
-                </a:solidFill>
-                <a:latin typeface="微软雅黑" panose="020B0503020204020204" pitchFamily="34" charset="-122"/>
-                <a:ea typeface="微软雅黑" panose="020B0503020204020204" pitchFamily="34" charset="-122"/>
-              </a:defRPr>
-            </a:lvl1pPr>
-          </a:lstStyle>
-          <a:p>
-            <a:pPr marL="0" lvl="1">
-              <a:lnSpc>
-                <a:spcPct val="120000"/>
-              </a:lnSpc>
-              <a:spcBef>
-                <a:spcPct val="0"/>
-              </a:spcBef>
-              <a:buSzPct val="95000"/>
-              <a:defRPr/>
-            </a:pPr>
-            <a:r>
-              <a:rPr lang="zh-CN" altLang="en-US" sz="2000" b="1" dirty="0">
-                <a:solidFill>
-                  <a:prstClr val="black"/>
-                </a:solidFill>
-                <a:latin typeface="微软雅黑" panose="020B0503020204020204" charset="-122"/>
-                <a:ea typeface="微软雅黑" panose="020B0503020204020204" charset="-122"/>
-              </a:rPr>
-              <a:t>现有数据集难以覆盖云原生系统中的应用、容器运行时、</a:t>
-            </a:r>
-            <a:r>
-              <a:rPr lang="en-US" altLang="zh-CN" sz="2000" b="1" dirty="0">
-                <a:solidFill>
-                  <a:prstClr val="black"/>
-                </a:solidFill>
-                <a:latin typeface="微软雅黑" panose="020B0503020204020204" charset="-122"/>
-                <a:ea typeface="微软雅黑" panose="020B0503020204020204" charset="-122"/>
-              </a:rPr>
-              <a:t>Kubernetes </a:t>
-            </a:r>
-            <a:r>
-              <a:rPr lang="zh-CN" altLang="en-US" sz="2000" b="1" dirty="0">
-                <a:solidFill>
-                  <a:prstClr val="black"/>
-                </a:solidFill>
-                <a:latin typeface="微软雅黑" panose="020B0503020204020204" charset="-122"/>
-                <a:ea typeface="微软雅黑" panose="020B0503020204020204" charset="-122"/>
-              </a:rPr>
-              <a:t>组件等全系统攻击面。云原生系统持续演化导致</a:t>
-            </a:r>
-            <a:r>
-              <a:rPr lang="zh-CN" altLang="en-US" sz="2000" b="1" dirty="0">
-                <a:solidFill>
-                  <a:srgbClr val="C00000"/>
-                </a:solidFill>
-                <a:latin typeface="微软雅黑" panose="020B0503020204020204" charset="-122"/>
-                <a:ea typeface="微软雅黑" panose="020B0503020204020204" charset="-122"/>
-              </a:rPr>
-              <a:t>日志分布常态漂移</a:t>
-            </a:r>
-            <a:r>
-              <a:rPr lang="zh-CN" altLang="en-US" sz="2000" b="1" dirty="0">
-                <a:solidFill>
-                  <a:prstClr val="black"/>
-                </a:solidFill>
-                <a:latin typeface="微软雅黑" panose="020B0503020204020204" charset="-122"/>
-                <a:ea typeface="微软雅黑" panose="020B0503020204020204" charset="-122"/>
-              </a:rPr>
-              <a:t>，使得现有攻击检测系统性能</a:t>
-            </a:r>
-            <a:r>
-              <a:rPr lang="zh-CN" altLang="en-US" sz="2000" b="1" dirty="0">
-                <a:solidFill>
-                  <a:srgbClr val="C00000"/>
-                </a:solidFill>
-                <a:latin typeface="微软雅黑" panose="020B0503020204020204" charset="-122"/>
-                <a:ea typeface="微软雅黑" panose="020B0503020204020204" charset="-122"/>
-              </a:rPr>
-              <a:t>显著下降。</a:t>
-            </a:r>
           </a:p>
         </p:txBody>
       </p:sp>
@@ -4755,6 +4445,553 @@
           </a:p>
         </p:txBody>
       </p:sp>
+      <p:sp>
+        <p:nvSpPr>
+          <p:cNvPr id="16" name="文本框 20">
+            <a:extLst>
+              <a:ext uri="{FF2B5EF4-FFF2-40B4-BE49-F238E27FC236}">
+                <a16:creationId xmlns:a16="http://schemas.microsoft.com/office/drawing/2014/main" id="{60836EBD-2C7F-4FA0-9832-D23B5FDCBDF1}"/>
+              </a:ext>
+            </a:extLst>
+          </p:cNvPr>
+          <p:cNvSpPr txBox="1"/>
+          <p:nvPr/>
+        </p:nvSpPr>
+        <p:spPr>
+          <a:xfrm>
+            <a:off x="396789" y="4951396"/>
+            <a:ext cx="4075748" cy="584775"/>
+          </a:xfrm>
+          <a:prstGeom prst="rect">
+            <a:avLst/>
+          </a:prstGeom>
+          <a:noFill/>
+        </p:spPr>
+        <p:txBody>
+          <a:bodyPr wrap="square">
+            <a:spAutoFit/>
+          </a:bodyPr>
+          <a:lstStyle/>
+          <a:p>
+            <a:pPr algn="ctr"/>
+            <a:r>
+              <a:rPr lang="zh-CN" altLang="en-US" sz="1600" b="1" dirty="0">
+                <a:effectLst/>
+                <a:latin typeface="微软雅黑" panose="020B0503020204020204" charset="-122"/>
+                <a:ea typeface="微软雅黑" panose="020B0503020204020204" charset="-122"/>
+              </a:rPr>
+              <a:t>真实云系统会持续发生</a:t>
+            </a:r>
+            <a:r>
+              <a:rPr lang="zh-CN" altLang="en-US" sz="1600" b="1" dirty="0">
+                <a:solidFill>
+                  <a:srgbClr val="C00000"/>
+                </a:solidFill>
+                <a:effectLst/>
+                <a:latin typeface="微软雅黑" panose="020B0503020204020204" charset="-122"/>
+                <a:ea typeface="微软雅黑" panose="020B0503020204020204" charset="-122"/>
+              </a:rPr>
+              <a:t>应用、版本和架构变化</a:t>
+            </a:r>
+            <a:r>
+              <a:rPr lang="zh-CN" altLang="en-US" sz="1600" b="1" dirty="0">
+                <a:effectLst/>
+                <a:latin typeface="微软雅黑" panose="020B0503020204020204" charset="-122"/>
+                <a:ea typeface="微软雅黑" panose="020B0503020204020204" charset="-122"/>
+              </a:rPr>
+              <a:t>，导致</a:t>
+            </a:r>
+            <a:r>
+              <a:rPr lang="zh-CN" altLang="en-US" sz="1600" b="1" dirty="0">
+                <a:solidFill>
+                  <a:srgbClr val="C00000"/>
+                </a:solidFill>
+                <a:effectLst/>
+                <a:latin typeface="微软雅黑" panose="020B0503020204020204" charset="-122"/>
+                <a:ea typeface="微软雅黑" panose="020B0503020204020204" charset="-122"/>
+              </a:rPr>
+              <a:t>训练分布</a:t>
+            </a:r>
+            <a:r>
+              <a:rPr lang="zh-CN" altLang="en-US" sz="1600" b="1" dirty="0">
+                <a:effectLst/>
+                <a:latin typeface="微软雅黑" panose="020B0503020204020204" charset="-122"/>
+                <a:ea typeface="微软雅黑" panose="020B0503020204020204" charset="-122"/>
+              </a:rPr>
+              <a:t>与</a:t>
+            </a:r>
+            <a:r>
+              <a:rPr lang="zh-CN" altLang="en-US" sz="1600" b="1" dirty="0">
+                <a:solidFill>
+                  <a:srgbClr val="C00000"/>
+                </a:solidFill>
+                <a:effectLst/>
+                <a:latin typeface="微软雅黑" panose="020B0503020204020204" charset="-122"/>
+                <a:ea typeface="微软雅黑" panose="020B0503020204020204" charset="-122"/>
+              </a:rPr>
+              <a:t>测试分布</a:t>
+            </a:r>
+            <a:r>
+              <a:rPr lang="zh-CN" altLang="en-US" sz="1600" b="1" dirty="0">
+                <a:effectLst/>
+                <a:latin typeface="微软雅黑" panose="020B0503020204020204" charset="-122"/>
+                <a:ea typeface="微软雅黑" panose="020B0503020204020204" charset="-122"/>
+              </a:rPr>
+              <a:t>不一致。</a:t>
+            </a:r>
+            <a:endParaRPr lang="zh-CN" altLang="en-US" sz="1600" b="1" dirty="0">
+              <a:solidFill>
+                <a:srgbClr val="C00000"/>
+              </a:solidFill>
+              <a:effectLst/>
+              <a:latin typeface="微软雅黑" panose="020B0503020204020204" charset="-122"/>
+              <a:ea typeface="微软雅黑" panose="020B0503020204020204" charset="-122"/>
+            </a:endParaRPr>
+          </a:p>
+        </p:txBody>
+      </p:sp>
+      <p:sp>
+        <p:nvSpPr>
+          <p:cNvPr id="17" name="文本框 20">
+            <a:extLst>
+              <a:ext uri="{FF2B5EF4-FFF2-40B4-BE49-F238E27FC236}">
+                <a16:creationId xmlns:a16="http://schemas.microsoft.com/office/drawing/2014/main" id="{2E3D9246-7219-4A41-BDD6-E4B20AC4E46A}"/>
+              </a:ext>
+            </a:extLst>
+          </p:cNvPr>
+          <p:cNvSpPr txBox="1"/>
+          <p:nvPr/>
+        </p:nvSpPr>
+        <p:spPr>
+          <a:xfrm>
+            <a:off x="4651103" y="4744849"/>
+            <a:ext cx="2934554" cy="830997"/>
+          </a:xfrm>
+          <a:prstGeom prst="rect">
+            <a:avLst/>
+          </a:prstGeom>
+          <a:noFill/>
+        </p:spPr>
+        <p:txBody>
+          <a:bodyPr wrap="square">
+            <a:spAutoFit/>
+          </a:bodyPr>
+          <a:lstStyle/>
+          <a:p>
+            <a:pPr algn="ctr"/>
+            <a:r>
+              <a:rPr lang="zh-CN" altLang="en-US" sz="1600" b="1" dirty="0">
+                <a:effectLst/>
+                <a:latin typeface="微软雅黑" panose="020B0503020204020204" charset="-122"/>
+                <a:ea typeface="微软雅黑" panose="020B0503020204020204" charset="-122"/>
+              </a:rPr>
+              <a:t>不同漂移场景下，正常日志分布明显</a:t>
+            </a:r>
+            <a:r>
+              <a:rPr lang="zh-CN" altLang="en-US" sz="1600" b="1" dirty="0">
+                <a:solidFill>
+                  <a:srgbClr val="C00000"/>
+                </a:solidFill>
+                <a:effectLst/>
+                <a:latin typeface="微软雅黑" panose="020B0503020204020204" charset="-122"/>
+                <a:ea typeface="微软雅黑" panose="020B0503020204020204" charset="-122"/>
+              </a:rPr>
+              <a:t>偏离原始分布</a:t>
+            </a:r>
+            <a:r>
+              <a:rPr lang="zh-CN" altLang="en-US" sz="1600" b="1" dirty="0">
+                <a:effectLst/>
+                <a:latin typeface="微软雅黑" panose="020B0503020204020204" charset="-122"/>
+                <a:ea typeface="微软雅黑" panose="020B0503020204020204" charset="-122"/>
+              </a:rPr>
+              <a:t>，模型容易将正常样本</a:t>
+            </a:r>
+            <a:r>
+              <a:rPr lang="zh-CN" altLang="en-US" sz="1600" b="1" dirty="0">
+                <a:solidFill>
+                  <a:srgbClr val="C00000"/>
+                </a:solidFill>
+                <a:effectLst/>
+                <a:latin typeface="微软雅黑" panose="020B0503020204020204" charset="-122"/>
+                <a:ea typeface="微软雅黑" panose="020B0503020204020204" charset="-122"/>
+              </a:rPr>
+              <a:t>误判</a:t>
+            </a:r>
+            <a:r>
+              <a:rPr lang="zh-CN" altLang="en-US" sz="1600" b="1" dirty="0">
+                <a:effectLst/>
+                <a:latin typeface="微软雅黑" panose="020B0503020204020204" charset="-122"/>
+                <a:ea typeface="微软雅黑" panose="020B0503020204020204" charset="-122"/>
+              </a:rPr>
+              <a:t>为异常。</a:t>
+            </a:r>
+          </a:p>
+        </p:txBody>
+      </p:sp>
+      <p:sp>
+        <p:nvSpPr>
+          <p:cNvPr id="18" name="文本框 20">
+            <a:extLst>
+              <a:ext uri="{FF2B5EF4-FFF2-40B4-BE49-F238E27FC236}">
+                <a16:creationId xmlns:a16="http://schemas.microsoft.com/office/drawing/2014/main" id="{4BF191C2-7349-4DE3-BB9E-58939D7C48E3}"/>
+              </a:ext>
+            </a:extLst>
+          </p:cNvPr>
+          <p:cNvSpPr txBox="1"/>
+          <p:nvPr/>
+        </p:nvSpPr>
+        <p:spPr>
+          <a:xfrm>
+            <a:off x="8032225" y="4988611"/>
+            <a:ext cx="3787277" cy="584775"/>
+          </a:xfrm>
+          <a:prstGeom prst="rect">
+            <a:avLst/>
+          </a:prstGeom>
+          <a:noFill/>
+        </p:spPr>
+        <p:txBody>
+          <a:bodyPr wrap="square">
+            <a:spAutoFit/>
+          </a:bodyPr>
+          <a:lstStyle/>
+          <a:p>
+            <a:pPr algn="ctr"/>
+            <a:r>
+              <a:rPr lang="zh-CN" altLang="en-US" sz="1600" b="1" dirty="0">
+                <a:effectLst/>
+                <a:latin typeface="微软雅黑" panose="020B0503020204020204" charset="-122"/>
+                <a:ea typeface="微软雅黑" panose="020B0503020204020204" charset="-122"/>
+              </a:rPr>
+              <a:t>系统调用频率在</a:t>
+            </a:r>
+            <a:r>
+              <a:rPr lang="zh-CN" altLang="en-US" sz="1600" b="1" dirty="0">
+                <a:solidFill>
+                  <a:srgbClr val="C00000"/>
+                </a:solidFill>
+                <a:effectLst/>
+                <a:latin typeface="微软雅黑" panose="020B0503020204020204" charset="-122"/>
+                <a:ea typeface="微软雅黑" panose="020B0503020204020204" charset="-122"/>
+              </a:rPr>
+              <a:t>漂移场景中显著变化</a:t>
+            </a:r>
+            <a:r>
+              <a:rPr lang="zh-CN" altLang="en-US" sz="1600" b="1" dirty="0">
+                <a:effectLst/>
+                <a:latin typeface="微软雅黑" panose="020B0503020204020204" charset="-122"/>
+                <a:ea typeface="微软雅黑" panose="020B0503020204020204" charset="-122"/>
+              </a:rPr>
+              <a:t>，说明鲁棒模型需要</a:t>
+            </a:r>
+            <a:r>
+              <a:rPr lang="zh-CN" altLang="en-US" sz="1600" b="1" dirty="0">
+                <a:solidFill>
+                  <a:srgbClr val="C00000"/>
+                </a:solidFill>
+                <a:effectLst/>
+                <a:latin typeface="微软雅黑" panose="020B0503020204020204" charset="-122"/>
+                <a:ea typeface="微软雅黑" panose="020B0503020204020204" charset="-122"/>
+              </a:rPr>
+              <a:t>适应动态业务分布</a:t>
+            </a:r>
+            <a:r>
+              <a:rPr lang="zh-CN" altLang="en-US" sz="1600" b="1" dirty="0">
+                <a:effectLst/>
+                <a:latin typeface="微软雅黑" panose="020B0503020204020204" charset="-122"/>
+                <a:ea typeface="微软雅黑" panose="020B0503020204020204" charset="-122"/>
+              </a:rPr>
+              <a:t>。</a:t>
+            </a:r>
+          </a:p>
+        </p:txBody>
+      </p:sp>
+      <p:pic>
+        <p:nvPicPr>
+          <p:cNvPr id="19" name="图片 18">
+            <a:extLst>
+              <a:ext uri="{FF2B5EF4-FFF2-40B4-BE49-F238E27FC236}">
+                <a16:creationId xmlns:a16="http://schemas.microsoft.com/office/drawing/2014/main" id="{CCD7AA66-D0E6-4C09-B5EE-37BC927C06F4}"/>
+              </a:ext>
+            </a:extLst>
+          </p:cNvPr>
+          <p:cNvPicPr>
+            <a:picLocks noChangeAspect="1"/>
+          </p:cNvPicPr>
+          <p:nvPr/>
+        </p:nvPicPr>
+        <p:blipFill>
+          <a:blip r:embed="rId4"/>
+          <a:stretch>
+            <a:fillRect/>
+          </a:stretch>
+        </p:blipFill>
+        <p:spPr>
+          <a:xfrm>
+            <a:off x="345595" y="2578992"/>
+            <a:ext cx="4126942" cy="1940483"/>
+          </a:xfrm>
+          <a:prstGeom prst="rect">
+            <a:avLst/>
+          </a:prstGeom>
+        </p:spPr>
+      </p:pic>
+      <p:pic>
+        <p:nvPicPr>
+          <p:cNvPr id="20" name="图片 19">
+            <a:extLst>
+              <a:ext uri="{FF2B5EF4-FFF2-40B4-BE49-F238E27FC236}">
+                <a16:creationId xmlns:a16="http://schemas.microsoft.com/office/drawing/2014/main" id="{599A8AA7-F397-407B-A25D-A08A20605209}"/>
+              </a:ext>
+            </a:extLst>
+          </p:cNvPr>
+          <p:cNvPicPr>
+            <a:picLocks noChangeAspect="1"/>
+          </p:cNvPicPr>
+          <p:nvPr/>
+        </p:nvPicPr>
+        <p:blipFill>
+          <a:blip r:embed="rId5"/>
+          <a:stretch>
+            <a:fillRect/>
+          </a:stretch>
+        </p:blipFill>
+        <p:spPr>
+          <a:xfrm>
+            <a:off x="4950656" y="2427870"/>
+            <a:ext cx="2379391" cy="2254160"/>
+          </a:xfrm>
+          <a:prstGeom prst="rect">
+            <a:avLst/>
+          </a:prstGeom>
+        </p:spPr>
+      </p:pic>
+      <p:pic>
+        <p:nvPicPr>
+          <p:cNvPr id="21" name="图片 20">
+            <a:extLst>
+              <a:ext uri="{FF2B5EF4-FFF2-40B4-BE49-F238E27FC236}">
+                <a16:creationId xmlns:a16="http://schemas.microsoft.com/office/drawing/2014/main" id="{B90AAD15-B40D-43A4-8867-9CAD1D935302}"/>
+              </a:ext>
+            </a:extLst>
+          </p:cNvPr>
+          <p:cNvPicPr>
+            <a:picLocks noChangeAspect="1"/>
+          </p:cNvPicPr>
+          <p:nvPr/>
+        </p:nvPicPr>
+        <p:blipFill>
+          <a:blip r:embed="rId6"/>
+          <a:stretch>
+            <a:fillRect/>
+          </a:stretch>
+        </p:blipFill>
+        <p:spPr>
+          <a:xfrm>
+            <a:off x="7942789" y="2413816"/>
+            <a:ext cx="3876713" cy="2574795"/>
+          </a:xfrm>
+          <a:prstGeom prst="rect">
+            <a:avLst/>
+          </a:prstGeom>
+        </p:spPr>
+      </p:pic>
+      <p:sp>
+        <p:nvSpPr>
+          <p:cNvPr id="13" name="矩形: 圆角 28">
+            <a:extLst>
+              <a:ext uri="{FF2B5EF4-FFF2-40B4-BE49-F238E27FC236}">
+                <a16:creationId xmlns:a16="http://schemas.microsoft.com/office/drawing/2014/main" id="{0F0D9322-354A-4870-A3DA-B02281DF8F58}"/>
+              </a:ext>
+            </a:extLst>
+          </p:cNvPr>
+          <p:cNvSpPr/>
+          <p:nvPr/>
+        </p:nvSpPr>
+        <p:spPr>
+          <a:xfrm>
+            <a:off x="345874" y="1432180"/>
+            <a:ext cx="11512931" cy="956829"/>
+          </a:xfrm>
+          <a:prstGeom prst="roundRect">
+            <a:avLst>
+              <a:gd name="adj" fmla="val 3558"/>
+            </a:avLst>
+          </a:prstGeom>
+          <a:solidFill>
+            <a:sysClr val="window" lastClr="FFFFFF"/>
+          </a:solidFill>
+          <a:ln w="6350" cap="flat" cmpd="sng" algn="ctr">
+            <a:solidFill>
+              <a:srgbClr val="003399">
+                <a:alpha val="28000"/>
+              </a:srgbClr>
+            </a:solidFill>
+            <a:prstDash val="solid"/>
+            <a:miter lim="800000"/>
+          </a:ln>
+          <a:effectLst>
+            <a:outerShdw blurRad="203200" dist="88900" dir="5400000" sx="96000" sy="96000" algn="t" rotWithShape="0">
+              <a:srgbClr val="003399">
+                <a:alpha val="23000"/>
+              </a:srgbClr>
+            </a:outerShdw>
+          </a:effectLst>
+        </p:spPr>
+        <p:txBody>
+          <a:bodyPr rtlCol="0" anchor="ctr"/>
+          <a:lstStyle/>
+          <a:p>
+            <a:pPr marL="0" marR="0" lvl="0" indent="0" algn="ctr" defTabSz="914400" eaLnBrk="1" fontAlgn="auto" latinLnBrk="0" hangingPunct="1">
+              <a:lnSpc>
+                <a:spcPct val="100000"/>
+              </a:lnSpc>
+              <a:spcBef>
+                <a:spcPts val="0"/>
+              </a:spcBef>
+              <a:spcAft>
+                <a:spcPts val="0"/>
+              </a:spcAft>
+              <a:buClrTx/>
+              <a:buSzTx/>
+              <a:buFontTx/>
+              <a:buNone/>
+              <a:tabLst/>
+              <a:defRPr/>
+            </a:pPr>
+            <a:endParaRPr kumimoji="0" lang="zh-CN" altLang="en-US" sz="1350" b="0" i="0" u="none" strike="noStrike" kern="0" cap="none" spc="0" normalizeH="0" baseline="0" noProof="0" dirty="0">
+              <a:ln>
+                <a:noFill/>
+              </a:ln>
+              <a:solidFill>
+                <a:prstClr val="white"/>
+              </a:solidFill>
+              <a:effectLst/>
+              <a:uLnTx/>
+              <a:uFillTx/>
+              <a:latin typeface="Roboto"/>
+              <a:ea typeface="思源黑体 CN Regular"/>
+              <a:cs typeface="+mn-cs"/>
+            </a:endParaRPr>
+          </a:p>
+        </p:txBody>
+      </p:sp>
+      <p:sp>
+        <p:nvSpPr>
+          <p:cNvPr id="14" name="文本框 7">
+            <a:extLst>
+              <a:ext uri="{FF2B5EF4-FFF2-40B4-BE49-F238E27FC236}">
+                <a16:creationId xmlns:a16="http://schemas.microsoft.com/office/drawing/2014/main" id="{88C49DF7-ABD8-45EA-B60D-BE4AA5AB5762}"/>
+              </a:ext>
+            </a:extLst>
+          </p:cNvPr>
+          <p:cNvSpPr txBox="1"/>
+          <p:nvPr/>
+        </p:nvSpPr>
+        <p:spPr>
+          <a:xfrm>
+            <a:off x="522339" y="1510773"/>
+            <a:ext cx="11160000" cy="799706"/>
+          </a:xfrm>
+          <a:prstGeom prst="rect">
+            <a:avLst/>
+          </a:prstGeom>
+          <a:noFill/>
+        </p:spPr>
+        <p:txBody>
+          <a:bodyPr wrap="square">
+            <a:spAutoFit/>
+          </a:bodyPr>
+          <a:lstStyle>
+            <a:defPPr>
+              <a:defRPr lang="en-US"/>
+            </a:defPPr>
+            <a:lvl1pPr marL="342900" indent="-342900">
+              <a:buFont typeface="Wingdings" panose="05000000000000000000" pitchFamily="2" charset="2"/>
+              <a:buChar char="Ø"/>
+              <a:defRPr sz="2000" b="1">
+                <a:solidFill>
+                  <a:srgbClr val="2E8DBB"/>
+                </a:solidFill>
+                <a:latin typeface="微软雅黑" panose="020B0503020204020204" pitchFamily="34" charset="-122"/>
+                <a:ea typeface="微软雅黑" panose="020B0503020204020204" pitchFamily="34" charset="-122"/>
+              </a:defRPr>
+            </a:lvl1pPr>
+          </a:lstStyle>
+          <a:p>
+            <a:pPr marL="0" lvl="1">
+              <a:lnSpc>
+                <a:spcPct val="120000"/>
+              </a:lnSpc>
+              <a:spcBef>
+                <a:spcPct val="0"/>
+              </a:spcBef>
+              <a:buSzPct val="95000"/>
+              <a:defRPr/>
+            </a:pPr>
+            <a:r>
+              <a:rPr lang="zh-CN" altLang="en-US" sz="2000" b="1" dirty="0">
+                <a:solidFill>
+                  <a:prstClr val="black"/>
+                </a:solidFill>
+                <a:latin typeface="微软雅黑" panose="020B0503020204020204" charset="-122"/>
+                <a:ea typeface="微软雅黑" panose="020B0503020204020204" charset="-122"/>
+              </a:rPr>
+              <a:t>现有数据集难以覆盖云原生系统中的应用、容器运行时、</a:t>
+            </a:r>
+            <a:r>
+              <a:rPr lang="en-US" altLang="zh-CN" sz="2000" b="1" dirty="0">
+                <a:solidFill>
+                  <a:prstClr val="black"/>
+                </a:solidFill>
+                <a:latin typeface="微软雅黑" panose="020B0503020204020204" charset="-122"/>
+                <a:ea typeface="微软雅黑" panose="020B0503020204020204" charset="-122"/>
+              </a:rPr>
+              <a:t>Kubernetes </a:t>
+            </a:r>
+            <a:r>
+              <a:rPr lang="zh-CN" altLang="en-US" sz="2000" b="1" dirty="0">
+                <a:solidFill>
+                  <a:prstClr val="black"/>
+                </a:solidFill>
+                <a:latin typeface="微软雅黑" panose="020B0503020204020204" charset="-122"/>
+                <a:ea typeface="微软雅黑" panose="020B0503020204020204" charset="-122"/>
+              </a:rPr>
+              <a:t>组件等全系统攻击面。云原生系统持续演化导致</a:t>
+            </a:r>
+            <a:r>
+              <a:rPr lang="zh-CN" altLang="en-US" sz="2000" b="1" dirty="0">
+                <a:solidFill>
+                  <a:srgbClr val="C00000"/>
+                </a:solidFill>
+                <a:latin typeface="微软雅黑" panose="020B0503020204020204" charset="-122"/>
+                <a:ea typeface="微软雅黑" panose="020B0503020204020204" charset="-122"/>
+              </a:rPr>
+              <a:t>日志分布常态漂移</a:t>
+            </a:r>
+            <a:r>
+              <a:rPr lang="zh-CN" altLang="en-US" sz="2000" b="1" dirty="0">
+                <a:solidFill>
+                  <a:prstClr val="black"/>
+                </a:solidFill>
+                <a:latin typeface="微软雅黑" panose="020B0503020204020204" charset="-122"/>
+                <a:ea typeface="微软雅黑" panose="020B0503020204020204" charset="-122"/>
+              </a:rPr>
+              <a:t>，使得现有攻击检测系统性能</a:t>
+            </a:r>
+            <a:r>
+              <a:rPr lang="zh-CN" altLang="en-US" sz="2000" b="1" dirty="0">
+                <a:solidFill>
+                  <a:srgbClr val="C00000"/>
+                </a:solidFill>
+                <a:latin typeface="微软雅黑" panose="020B0503020204020204" charset="-122"/>
+                <a:ea typeface="微软雅黑" panose="020B0503020204020204" charset="-122"/>
+              </a:rPr>
+              <a:t>显著下降。</a:t>
+            </a:r>
+          </a:p>
+        </p:txBody>
+      </p:sp>
     </p:spTree>
     <p:extLst>
       <p:ext uri="{BB962C8B-B14F-4D97-AF65-F5344CB8AC3E}">
@@ -4777,6 +5014,9 @@
                     <p:cTn id="3" fill="hold">
                       <p:stCondLst>
                         <p:cond delay="indefinite"/>
+                        <p:cond evt="onBegin" delay="0">
+                          <p:tn val="2"/>
+                        </p:cond>
                       </p:stCondLst>
                       <p:childTnLst>
                         <p:par>
@@ -4786,7 +5026,7 @@
                             </p:stCondLst>
                             <p:childTnLst>
                               <p:par>
-                                <p:cTn id="5" presetID="10" presetClass="entr" presetSubtype="0" fill="hold" nodeType="clickEffect">
+                                <p:cTn id="5" presetID="2" presetClass="entr" presetSubtype="8" fill="hold" grpId="0" nodeType="withEffect">
                                   <p:stCondLst>
                                     <p:cond delay="0"/>
                                   </p:stCondLst>
@@ -4794,41 +5034,6 @@
                                     <p:set>
                                       <p:cBhvr>
                                         <p:cTn id="6" dur="1" fill="hold">
-                                          <p:stCondLst>
-                                            <p:cond delay="0"/>
-                                          </p:stCondLst>
-                                        </p:cTn>
-                                        <p:tgtEl>
-                                          <p:spTgt spid="4"/>
-                                        </p:tgtEl>
-                                        <p:attrNameLst>
-                                          <p:attrName>style.visibility</p:attrName>
-                                        </p:attrNameLst>
-                                      </p:cBhvr>
-                                      <p:to>
-                                        <p:strVal val="visible"/>
-                                      </p:to>
-                                    </p:set>
-                                    <p:animEffect transition="in" filter="fade">
-                                      <p:cBhvr>
-                                        <p:cTn id="7" dur="200"/>
-                                        <p:tgtEl>
-                                          <p:spTgt spid="4"/>
-                                        </p:tgtEl>
-                                      </p:cBhvr>
-                                    </p:animEffect>
-                                  </p:childTnLst>
-                                </p:cTn>
-                              </p:par>
-                              <p:par>
-                                <p:cTn id="8" presetID="2" presetClass="entr" presetSubtype="8" fill="hold" grpId="0" nodeType="withEffect">
-                                  <p:stCondLst>
-                                    <p:cond delay="0"/>
-                                  </p:stCondLst>
-                                  <p:childTnLst>
-                                    <p:set>
-                                      <p:cBhvr>
-                                        <p:cTn id="9" dur="1" fill="hold">
                                           <p:stCondLst>
                                             <p:cond delay="0"/>
                                           </p:stCondLst>
@@ -4846,7 +5051,7 @@
                                     </p:set>
                                     <p:anim calcmode="lin" valueType="num">
                                       <p:cBhvr additive="base">
-                                        <p:cTn id="10" dur="500" fill="hold"/>
+                                        <p:cTn id="7" dur="500" fill="hold"/>
                                         <p:tgtEl>
                                           <p:spTgt spid="15"/>
                                         </p:tgtEl>
@@ -4869,7 +5074,7 @@
                                     </p:anim>
                                     <p:anim calcmode="lin" valueType="num">
                                       <p:cBhvr additive="base">
-                                        <p:cTn id="11" dur="500" fill="hold"/>
+                                        <p:cTn id="8" dur="500" fill="hold"/>
                                         <p:tgtEl>
                                           <p:spTgt spid="15"/>
                                         </p:tgtEl>

--- a/ppts/FSE2025CAShift.pptx
+++ b/ppts/FSE2025CAShift.pptx
@@ -5,7 +5,7 @@
     <p:sldMasterId id="2147483648" r:id="rId1"/>
   </p:sldMasterIdLst>
   <p:sldIdLst>
-    <p:sldId id="256" r:id="rId2"/>
+    <p:sldId id="257" r:id="rId2"/>
   </p:sldIdLst>
   <p:sldSz cx="12192000" cy="6858000"/>
   <p:notesSz cx="6858000" cy="9144000"/>
@@ -259,7 +259,7 @@
           <a:p>
             <a:fld id="{4F34AFB9-F75C-485B-B98D-03B7C4B5C9E8}" type="datetimeFigureOut">
               <a:rPr lang="zh-CN" altLang="en-US" smtClean="0"/>
-              <a:t>2026/5/20</a:t>
+              <a:t>2026/5/23</a:t>
             </a:fld>
             <a:endParaRPr lang="zh-CN" altLang="en-US"/>
           </a:p>
@@ -457,7 +457,7 @@
           <a:p>
             <a:fld id="{4F34AFB9-F75C-485B-B98D-03B7C4B5C9E8}" type="datetimeFigureOut">
               <a:rPr lang="zh-CN" altLang="en-US" smtClean="0"/>
-              <a:t>2026/5/20</a:t>
+              <a:t>2026/5/23</a:t>
             </a:fld>
             <a:endParaRPr lang="zh-CN" altLang="en-US"/>
           </a:p>
@@ -665,7 +665,7 @@
           <a:p>
             <a:fld id="{4F34AFB9-F75C-485B-B98D-03B7C4B5C9E8}" type="datetimeFigureOut">
               <a:rPr lang="zh-CN" altLang="en-US" smtClean="0"/>
-              <a:t>2026/5/20</a:t>
+              <a:t>2026/5/23</a:t>
             </a:fld>
             <a:endParaRPr lang="zh-CN" altLang="en-US"/>
           </a:p>
@@ -863,7 +863,7 @@
           <a:p>
             <a:fld id="{4F34AFB9-F75C-485B-B98D-03B7C4B5C9E8}" type="datetimeFigureOut">
               <a:rPr lang="zh-CN" altLang="en-US" smtClean="0"/>
-              <a:t>2026/5/20</a:t>
+              <a:t>2026/5/23</a:t>
             </a:fld>
             <a:endParaRPr lang="zh-CN" altLang="en-US"/>
           </a:p>
@@ -1138,7 +1138,7 @@
           <a:p>
             <a:fld id="{4F34AFB9-F75C-485B-B98D-03B7C4B5C9E8}" type="datetimeFigureOut">
               <a:rPr lang="zh-CN" altLang="en-US" smtClean="0"/>
-              <a:t>2026/5/20</a:t>
+              <a:t>2026/5/23</a:t>
             </a:fld>
             <a:endParaRPr lang="zh-CN" altLang="en-US"/>
           </a:p>
@@ -1403,7 +1403,7 @@
           <a:p>
             <a:fld id="{4F34AFB9-F75C-485B-B98D-03B7C4B5C9E8}" type="datetimeFigureOut">
               <a:rPr lang="zh-CN" altLang="en-US" smtClean="0"/>
-              <a:t>2026/5/20</a:t>
+              <a:t>2026/5/23</a:t>
             </a:fld>
             <a:endParaRPr lang="zh-CN" altLang="en-US"/>
           </a:p>
@@ -1815,7 +1815,7 @@
           <a:p>
             <a:fld id="{4F34AFB9-F75C-485B-B98D-03B7C4B5C9E8}" type="datetimeFigureOut">
               <a:rPr lang="zh-CN" altLang="en-US" smtClean="0"/>
-              <a:t>2026/5/20</a:t>
+              <a:t>2026/5/23</a:t>
             </a:fld>
             <a:endParaRPr lang="zh-CN" altLang="en-US"/>
           </a:p>
@@ -1956,7 +1956,7 @@
           <a:p>
             <a:fld id="{4F34AFB9-F75C-485B-B98D-03B7C4B5C9E8}" type="datetimeFigureOut">
               <a:rPr lang="zh-CN" altLang="en-US" smtClean="0"/>
-              <a:t>2026/5/20</a:t>
+              <a:t>2026/5/23</a:t>
             </a:fld>
             <a:endParaRPr lang="zh-CN" altLang="en-US"/>
           </a:p>
@@ -2069,7 +2069,7 @@
           <a:p>
             <a:fld id="{4F34AFB9-F75C-485B-B98D-03B7C4B5C9E8}" type="datetimeFigureOut">
               <a:rPr lang="zh-CN" altLang="en-US" smtClean="0"/>
-              <a:t>2026/5/20</a:t>
+              <a:t>2026/5/23</a:t>
             </a:fld>
             <a:endParaRPr lang="zh-CN" altLang="en-US"/>
           </a:p>
@@ -2380,7 +2380,7 @@
           <a:p>
             <a:fld id="{4F34AFB9-F75C-485B-B98D-03B7C4B5C9E8}" type="datetimeFigureOut">
               <a:rPr lang="zh-CN" altLang="en-US" smtClean="0"/>
-              <a:t>2026/5/20</a:t>
+              <a:t>2026/5/23</a:t>
             </a:fld>
             <a:endParaRPr lang="zh-CN" altLang="en-US"/>
           </a:p>
@@ -2668,7 +2668,7 @@
           <a:p>
             <a:fld id="{4F34AFB9-F75C-485B-B98D-03B7C4B5C9E8}" type="datetimeFigureOut">
               <a:rPr lang="zh-CN" altLang="en-US" smtClean="0"/>
-              <a:t>2026/5/20</a:t>
+              <a:t>2026/5/23</a:t>
             </a:fld>
             <a:endParaRPr lang="zh-CN" altLang="en-US"/>
           </a:p>
@@ -2909,7 +2909,7 @@
           <a:p>
             <a:fld id="{4F34AFB9-F75C-485B-B98D-03B7C4B5C9E8}" type="datetimeFigureOut">
               <a:rPr lang="zh-CN" altLang="en-US" smtClean="0"/>
-              <a:t>2026/5/20</a:t>
+              <a:t>2026/5/23</a:t>
             </a:fld>
             <a:endParaRPr lang="zh-CN" altLang="en-US"/>
           </a:p>
@@ -3314,7 +3314,13 @@
   <p:cSld>
     <p:spTree>
       <p:nvGrpSpPr>
-        <p:cNvPr id="1" name=""/>
+        <p:cNvPr id="1" name="">
+          <a:extLst>
+            <a:ext uri="{FF2B5EF4-FFF2-40B4-BE49-F238E27FC236}">
+              <a16:creationId xmlns:a16="http://schemas.microsoft.com/office/drawing/2014/main" id="{1895D7CD-F92A-BF7E-B3B9-80EF65D791C7}"/>
+            </a:ext>
+          </a:extLst>
+        </p:cNvPr>
         <p:cNvGrpSpPr/>
         <p:nvPr/>
       </p:nvGrpSpPr>
@@ -3331,7 +3337,7 @@
           <p:cNvPr id="45" name="bk object 19">
             <a:extLst>
               <a:ext uri="{FF2B5EF4-FFF2-40B4-BE49-F238E27FC236}">
-                <a16:creationId xmlns:a16="http://schemas.microsoft.com/office/drawing/2014/main" id="{2A77D5EF-D757-4FE6-9442-8D86E5735841}"/>
+                <a16:creationId xmlns:a16="http://schemas.microsoft.com/office/drawing/2014/main" id="{DC64C2D3-1547-7474-583F-43DEFACE45D2}"/>
               </a:ext>
             </a:extLst>
           </p:cNvPr>
@@ -3468,7 +3474,7 @@
           <p:cNvPr id="46" name="bk object 18">
             <a:extLst>
               <a:ext uri="{FF2B5EF4-FFF2-40B4-BE49-F238E27FC236}">
-                <a16:creationId xmlns:a16="http://schemas.microsoft.com/office/drawing/2014/main" id="{503E7D83-ADF7-430D-B380-76F03034DBE7}"/>
+                <a16:creationId xmlns:a16="http://schemas.microsoft.com/office/drawing/2014/main" id="{9E445803-DD05-F288-C506-638FFD55CB9A}"/>
               </a:ext>
             </a:extLst>
           </p:cNvPr>
@@ -3663,7 +3669,7 @@
           <p:cNvPr id="47" name="文本框 46">
             <a:extLst>
               <a:ext uri="{FF2B5EF4-FFF2-40B4-BE49-F238E27FC236}">
-                <a16:creationId xmlns:a16="http://schemas.microsoft.com/office/drawing/2014/main" id="{32104440-C344-4EC3-AB8D-5ED4C83848E9}"/>
+                <a16:creationId xmlns:a16="http://schemas.microsoft.com/office/drawing/2014/main" id="{82D13838-EA04-3600-B2EC-D676C2594ACC}"/>
               </a:ext>
             </a:extLst>
           </p:cNvPr>
@@ -3696,7 +3702,7 @@
                 <a:cs typeface="+mn-ea"/>
                 <a:sym typeface="Arial" panose="020B0604020202020204" pitchFamily="34" charset="0"/>
               </a:rPr>
-              <a:t>代表成果：云原生日志攻击检测基准与分布漂移分析</a:t>
+              <a:t>代表成果：常态漂移下云原生系统外部攻击检测基准</a:t>
             </a:r>
           </a:p>
         </p:txBody>
@@ -3706,7 +3712,7 @@
           <p:cNvPr id="48" name="文本框 4">
             <a:extLst>
               <a:ext uri="{FF2B5EF4-FFF2-40B4-BE49-F238E27FC236}">
-                <a16:creationId xmlns:a16="http://schemas.microsoft.com/office/drawing/2014/main" id="{ED94564E-D7C9-4B8D-84A2-8E984E351D41}"/>
+                <a16:creationId xmlns:a16="http://schemas.microsoft.com/office/drawing/2014/main" id="{7B917B6A-DC9A-1588-F654-21DC3A553AAC}"/>
               </a:ext>
             </a:extLst>
           </p:cNvPr>
@@ -3755,7 +3761,7 @@
           <p:cNvPr id="52" name="矩形 51">
             <a:extLst>
               <a:ext uri="{FF2B5EF4-FFF2-40B4-BE49-F238E27FC236}">
-                <a16:creationId xmlns:a16="http://schemas.microsoft.com/office/drawing/2014/main" id="{F412BE57-0AEC-402A-A5EA-A3DB5DCC178C}"/>
+                <a16:creationId xmlns:a16="http://schemas.microsoft.com/office/drawing/2014/main" id="{14AE9F25-9F54-9705-5278-BD149DB5F9CD}"/>
               </a:ext>
             </a:extLst>
           </p:cNvPr>
@@ -3765,7 +3771,7 @@
         <p:spPr>
           <a:xfrm>
             <a:off x="383706" y="5555757"/>
-            <a:ext cx="11398805" cy="935677"/>
+            <a:ext cx="11398805" cy="956829"/>
           </a:xfrm>
           <a:prstGeom prst="rect">
             <a:avLst/>
@@ -3784,315 +3790,215 @@
           <a:bodyPr rtlCol="0" anchor="ctr"/>
           <a:lstStyle/>
           <a:p>
-            <a:pPr lvl="0">
+            <a:pPr>
               <a:defRPr/>
             </a:pPr>
             <a:r>
-              <a:rPr lang="en-US" altLang="zh-CN" b="1" kern="0" dirty="0" err="1">
+              <a:rPr lang="zh-CN" altLang="en-US" sz="2000" b="1" kern="0" dirty="0">
                 <a:solidFill>
                   <a:prstClr val="white"/>
                 </a:solidFill>
                 <a:latin typeface="微软雅黑" panose="020B0503020204020204" charset="-122"/>
                 <a:ea typeface="微软雅黑" panose="020B0503020204020204" charset="-122"/>
               </a:rPr>
-              <a:t>CAShift</a:t>
-            </a:r>
-            <a:r>
-              <a:rPr lang="en-US" altLang="zh-CN" b="1" kern="0" dirty="0">
-                <a:solidFill>
-                  <a:prstClr val="white"/>
+              <a:t>通过构建</a:t>
+            </a:r>
+            <a:r>
+              <a:rPr lang="zh-CN" altLang="en-US" sz="2000" b="1" kern="0" dirty="0">
+                <a:solidFill>
+                  <a:srgbClr val="FFC000"/>
                 </a:solidFill>
                 <a:latin typeface="微软雅黑" panose="020B0503020204020204" charset="-122"/>
                 <a:ea typeface="微软雅黑" panose="020B0503020204020204" charset="-122"/>
               </a:rPr>
-              <a:t> </a:t>
-            </a:r>
-            <a:r>
-              <a:rPr lang="zh-CN" altLang="en-US" b="1" kern="0" dirty="0">
+              <a:t>首个支持三种</a:t>
+            </a:r>
+            <a:r>
+              <a:rPr lang="zh-CN" altLang="en-US" sz="2000" b="1" kern="0" dirty="0">
                 <a:solidFill>
                   <a:prstClr val="white"/>
                 </a:solidFill>
                 <a:latin typeface="微软雅黑" panose="020B0503020204020204" charset="-122"/>
                 <a:ea typeface="微软雅黑" panose="020B0503020204020204" charset="-122"/>
               </a:rPr>
-              <a:t>包含 </a:t>
-            </a:r>
-            <a:r>
-              <a:rPr lang="en-US" altLang="zh-CN" b="1" kern="0" dirty="0">
-                <a:solidFill>
-                  <a:srgbClr val="FFC000"/>
+              <a:t>云上常态漂移的攻击数据集</a:t>
+            </a:r>
+            <a:r>
+              <a:rPr lang="en-US" altLang="zh-CN" sz="2000" b="1" kern="0" dirty="0" err="1">
+                <a:solidFill>
+                  <a:prstClr val="white"/>
                 </a:solidFill>
                 <a:latin typeface="微软雅黑" panose="020B0503020204020204" charset="-122"/>
                 <a:ea typeface="微软雅黑" panose="020B0503020204020204" charset="-122"/>
               </a:rPr>
-              <a:t>27,000 </a:t>
-            </a:r>
-            <a:r>
-              <a:rPr lang="zh-CN" altLang="en-US" b="1" kern="0" dirty="0">
-                <a:solidFill>
-                  <a:srgbClr val="FFC000"/>
+              <a:t>CASHift</a:t>
+            </a:r>
+            <a:r>
+              <a:rPr lang="zh-CN" altLang="en-US" sz="2000" b="1" kern="0" dirty="0">
+                <a:solidFill>
+                  <a:prstClr val="white"/>
                 </a:solidFill>
                 <a:latin typeface="微软雅黑" panose="020B0503020204020204" charset="-122"/>
                 <a:ea typeface="微软雅黑" panose="020B0503020204020204" charset="-122"/>
               </a:rPr>
-              <a:t>条正常系统调用</a:t>
-            </a:r>
-            <a:r>
-              <a:rPr lang="zh-CN" altLang="en-US" b="1" kern="0" dirty="0">
+              <a:t>（</a:t>
+            </a:r>
+            <a:r>
+              <a:rPr lang="en-US" altLang="zh-CN" sz="2000" b="1" kern="0" dirty="0">
                 <a:solidFill>
                   <a:prstClr val="white"/>
                 </a:solidFill>
                 <a:latin typeface="微软雅黑" panose="020B0503020204020204" charset="-122"/>
                 <a:ea typeface="微软雅黑" panose="020B0503020204020204" charset="-122"/>
               </a:rPr>
-              <a:t>轨迹、</a:t>
-            </a:r>
-            <a:r>
-              <a:rPr lang="en-US" altLang="zh-CN" b="1" kern="0" dirty="0">
-                <a:solidFill>
-                  <a:srgbClr val="FFC000"/>
+              <a:t>45</a:t>
+            </a:r>
+            <a:r>
+              <a:rPr lang="zh-CN" altLang="en-US" sz="2000" b="1" kern="0" dirty="0">
+                <a:solidFill>
+                  <a:prstClr val="white"/>
                 </a:solidFill>
                 <a:latin typeface="微软雅黑" panose="020B0503020204020204" charset="-122"/>
                 <a:ea typeface="微软雅黑" panose="020B0503020204020204" charset="-122"/>
               </a:rPr>
-              <a:t>2,000+ </a:t>
-            </a:r>
-            <a:r>
-              <a:rPr lang="zh-CN" altLang="en-US" b="1" kern="0" dirty="0">
-                <a:solidFill>
-                  <a:srgbClr val="FFC000"/>
+              <a:t>亿系统调用日志、</a:t>
+            </a:r>
+            <a:r>
+              <a:rPr lang="en-US" altLang="zh-CN" sz="2000" b="1" kern="0" dirty="0">
+                <a:solidFill>
+                  <a:prstClr val="white"/>
                 </a:solidFill>
                 <a:latin typeface="微软雅黑" panose="020B0503020204020204" charset="-122"/>
                 <a:ea typeface="微软雅黑" panose="020B0503020204020204" charset="-122"/>
               </a:rPr>
-              <a:t>条攻击轨迹</a:t>
-            </a:r>
-            <a:r>
-              <a:rPr lang="zh-CN" altLang="en-US" b="1" kern="0" dirty="0">
+              <a:t>20</a:t>
+            </a:r>
+            <a:r>
+              <a:rPr lang="zh-CN" altLang="en-US" sz="2000" b="1" kern="0" dirty="0">
                 <a:solidFill>
                   <a:prstClr val="white"/>
                 </a:solidFill>
                 <a:latin typeface="微软雅黑" panose="020B0503020204020204" charset="-122"/>
                 <a:ea typeface="微软雅黑" panose="020B0503020204020204" charset="-122"/>
               </a:rPr>
-              <a:t>、</a:t>
-            </a:r>
-            <a:r>
-              <a:rPr lang="en-US" altLang="zh-CN" b="1" kern="0" dirty="0">
-                <a:solidFill>
-                  <a:srgbClr val="FFC000"/>
+              <a:t>种真实</a:t>
+            </a:r>
+            <a:r>
+              <a:rPr lang="en-US" altLang="zh-CN" sz="2000" b="1" kern="0" dirty="0">
+                <a:solidFill>
+                  <a:prstClr val="white"/>
                 </a:solidFill>
                 <a:latin typeface="微软雅黑" panose="020B0503020204020204" charset="-122"/>
                 <a:ea typeface="微软雅黑" panose="020B0503020204020204" charset="-122"/>
               </a:rPr>
-              <a:t>4.5B </a:t>
-            </a:r>
-            <a:r>
-              <a:rPr lang="zh-CN" altLang="en-US" b="1" kern="0" dirty="0">
-                <a:solidFill>
-                  <a:srgbClr val="FFC000"/>
+              <a:t>CVE</a:t>
+            </a:r>
+            <a:r>
+              <a:rPr lang="zh-CN" altLang="en-US" sz="2000" b="1" kern="0" dirty="0">
+                <a:solidFill>
+                  <a:prstClr val="white"/>
                 </a:solidFill>
                 <a:latin typeface="微软雅黑" panose="020B0503020204020204" charset="-122"/>
                 <a:ea typeface="微软雅黑" panose="020B0503020204020204" charset="-122"/>
               </a:rPr>
-              <a:t>日志条目和 </a:t>
-            </a:r>
-            <a:r>
-              <a:rPr lang="en-US" altLang="zh-CN" b="1" kern="0" dirty="0">
-                <a:solidFill>
-                  <a:srgbClr val="FFC000"/>
+              <a:t>攻击、</a:t>
+            </a:r>
+            <a:r>
+              <a:rPr lang="en-US" altLang="zh-CN" sz="2000" b="1" kern="0" dirty="0">
+                <a:solidFill>
+                  <a:prstClr val="white"/>
                 </a:solidFill>
                 <a:latin typeface="微软雅黑" panose="020B0503020204020204" charset="-122"/>
                 <a:ea typeface="微软雅黑" panose="020B0503020204020204" charset="-122"/>
               </a:rPr>
-              <a:t>20 </a:t>
-            </a:r>
-            <a:r>
-              <a:rPr lang="zh-CN" altLang="en-US" b="1" kern="0" dirty="0">
-                <a:solidFill>
-                  <a:srgbClr val="FFC000"/>
+              <a:t>90+</a:t>
+            </a:r>
+            <a:r>
+              <a:rPr lang="zh-CN" altLang="en-US" sz="2000" b="1" kern="0" dirty="0">
+                <a:solidFill>
+                  <a:prstClr val="white"/>
                 </a:solidFill>
                 <a:latin typeface="微软雅黑" panose="020B0503020204020204" charset="-122"/>
                 <a:ea typeface="微软雅黑" panose="020B0503020204020204" charset="-122"/>
               </a:rPr>
-              <a:t>类云攻击场景</a:t>
-            </a:r>
-            <a:r>
-              <a:rPr lang="zh-CN" altLang="en-US" b="1" kern="0" dirty="0">
+              <a:t>小时记录），系统评估</a:t>
+            </a:r>
+            <a:r>
+              <a:rPr lang="en-US" altLang="zh-CN" sz="2000" b="1" kern="0" dirty="0">
                 <a:solidFill>
                   <a:prstClr val="white"/>
                 </a:solidFill>
                 <a:latin typeface="微软雅黑" panose="020B0503020204020204" charset="-122"/>
                 <a:ea typeface="微软雅黑" panose="020B0503020204020204" charset="-122"/>
               </a:rPr>
-              <a:t>；实验表明现有 </a:t>
-            </a:r>
-            <a:r>
-              <a:rPr lang="en-US" altLang="zh-CN" b="1" kern="0" dirty="0">
+              <a:t>8</a:t>
+            </a:r>
+            <a:r>
+              <a:rPr lang="zh-CN" altLang="en-US" sz="2000" b="1" kern="0" dirty="0">
                 <a:solidFill>
                   <a:prstClr val="white"/>
                 </a:solidFill>
                 <a:latin typeface="微软雅黑" panose="020B0503020204020204" charset="-122"/>
                 <a:ea typeface="微软雅黑" panose="020B0503020204020204" charset="-122"/>
               </a:rPr>
-              <a:t>LAD </a:t>
-            </a:r>
-            <a:r>
-              <a:rPr lang="zh-CN" altLang="en-US" b="1" kern="0" dirty="0">
-                <a:solidFill>
-                  <a:prstClr val="white"/>
+              <a:t>种攻击检测方法发现漂移导致性能</a:t>
+            </a:r>
+            <a:r>
+              <a:rPr lang="zh-CN" altLang="en-US" sz="2000" b="1" kern="0" dirty="0">
+                <a:solidFill>
+                  <a:srgbClr val="FFC000"/>
                 </a:solidFill>
                 <a:latin typeface="微软雅黑" panose="020B0503020204020204" charset="-122"/>
                 <a:ea typeface="微软雅黑" panose="020B0503020204020204" charset="-122"/>
               </a:rPr>
-              <a:t>方法在同分布场景下平均 </a:t>
-            </a:r>
-            <a:r>
-              <a:rPr lang="en-US" altLang="zh-CN" b="1" kern="0" dirty="0">
+              <a:t>下降最高</a:t>
+            </a:r>
+            <a:r>
+              <a:rPr lang="en-US" altLang="zh-CN" sz="2000" b="1" kern="0" dirty="0">
                 <a:solidFill>
                   <a:srgbClr val="FFC000"/>
                 </a:solidFill>
                 <a:latin typeface="微软雅黑" panose="020B0503020204020204" charset="-122"/>
                 <a:ea typeface="微软雅黑" panose="020B0503020204020204" charset="-122"/>
               </a:rPr>
-              <a:t>F1 </a:t>
-            </a:r>
-            <a:r>
-              <a:rPr lang="zh-CN" altLang="en-US" b="1" kern="0" dirty="0">
-                <a:solidFill>
-                  <a:srgbClr val="FFC000"/>
+              <a:t>34%</a:t>
+            </a:r>
+            <a:r>
+              <a:rPr lang="zh-CN" altLang="en-US" sz="2000" b="1" kern="0" dirty="0">
+                <a:solidFill>
+                  <a:prstClr val="white"/>
                 </a:solidFill>
                 <a:latin typeface="微软雅黑" panose="020B0503020204020204" charset="-122"/>
                 <a:ea typeface="微软雅黑" panose="020B0503020204020204" charset="-122"/>
               </a:rPr>
-              <a:t>可达 </a:t>
-            </a:r>
-            <a:r>
-              <a:rPr lang="en-US" altLang="zh-CN" b="1" kern="0" dirty="0">
+              <a:t>，并验证不确定性驱动的持续学习可</a:t>
+            </a:r>
+            <a:r>
+              <a:rPr lang="zh-CN" altLang="en-US" sz="2000" b="1" kern="0" dirty="0">
                 <a:solidFill>
                   <a:srgbClr val="FFC000"/>
                 </a:solidFill>
                 <a:latin typeface="微软雅黑" panose="020B0503020204020204" charset="-122"/>
                 <a:ea typeface="微软雅黑" panose="020B0503020204020204" charset="-122"/>
               </a:rPr>
-              <a:t>0.9+</a:t>
-            </a:r>
-            <a:r>
-              <a:rPr lang="zh-CN" altLang="en-US" b="1" kern="0" dirty="0">
-                <a:solidFill>
-                  <a:prstClr val="white"/>
+              <a:t>提升检测能力</a:t>
+            </a:r>
+            <a:r>
+              <a:rPr lang="en-US" altLang="zh-CN" sz="2000" b="1" kern="0" dirty="0">
+                <a:solidFill>
+                  <a:srgbClr val="FFC000"/>
                 </a:solidFill>
                 <a:latin typeface="微软雅黑" panose="020B0503020204020204" charset="-122"/>
                 <a:ea typeface="微软雅黑" panose="020B0503020204020204" charset="-122"/>
               </a:rPr>
-              <a:t>，但在 </a:t>
-            </a:r>
-            <a:r>
-              <a:rPr lang="en-US" altLang="zh-CN" b="1" kern="0" dirty="0">
-                <a:solidFill>
-                  <a:prstClr val="white"/>
-                </a:solidFill>
-                <a:latin typeface="微软雅黑" panose="020B0503020204020204" charset="-122"/>
-                <a:ea typeface="微软雅黑" panose="020B0503020204020204" charset="-122"/>
-              </a:rPr>
-              <a:t>normality shift </a:t>
-            </a:r>
-            <a:r>
-              <a:rPr lang="zh-CN" altLang="en-US" b="1" kern="0" dirty="0">
-                <a:solidFill>
-                  <a:prstClr val="white"/>
-                </a:solidFill>
-                <a:latin typeface="微软雅黑" panose="020B0503020204020204" charset="-122"/>
-                <a:ea typeface="微软雅黑" panose="020B0503020204020204" charset="-122"/>
-              </a:rPr>
-              <a:t>下 </a:t>
-            </a:r>
-            <a:r>
-              <a:rPr lang="en-US" altLang="zh-CN" b="1" kern="0" dirty="0">
-                <a:solidFill>
-                  <a:prstClr val="white"/>
-                </a:solidFill>
-                <a:latin typeface="微软雅黑" panose="020B0503020204020204" charset="-122"/>
-                <a:ea typeface="微软雅黑" panose="020B0503020204020204" charset="-122"/>
-              </a:rPr>
-              <a:t>F1 </a:t>
-            </a:r>
-            <a:r>
-              <a:rPr lang="zh-CN" altLang="en-US" b="1" kern="0" dirty="0">
-                <a:solidFill>
-                  <a:prstClr val="white"/>
-                </a:solidFill>
-                <a:latin typeface="微软雅黑" panose="020B0503020204020204" charset="-122"/>
-                <a:ea typeface="微软雅黑" panose="020B0503020204020204" charset="-122"/>
-              </a:rPr>
-              <a:t>最高</a:t>
-            </a:r>
-            <a:r>
-              <a:rPr lang="zh-CN" altLang="en-US" b="1" kern="0" dirty="0">
-                <a:solidFill>
-                  <a:srgbClr val="FFC000"/>
-                </a:solidFill>
-                <a:latin typeface="微软雅黑" panose="020B0503020204020204" charset="-122"/>
-                <a:ea typeface="微软雅黑" panose="020B0503020204020204" charset="-122"/>
-              </a:rPr>
-              <a:t>下降 </a:t>
-            </a:r>
-            <a:r>
-              <a:rPr lang="en-US" altLang="zh-CN" b="1" kern="0" dirty="0">
-                <a:solidFill>
-                  <a:srgbClr val="FFC000"/>
-                </a:solidFill>
-                <a:latin typeface="微软雅黑" panose="020B0503020204020204" charset="-122"/>
-                <a:ea typeface="微软雅黑" panose="020B0503020204020204" charset="-122"/>
-              </a:rPr>
-              <a:t>34%</a:t>
-            </a:r>
-            <a:r>
-              <a:rPr lang="zh-CN" altLang="en-US" b="1" kern="0" dirty="0">
-                <a:solidFill>
-                  <a:prstClr val="white"/>
-                </a:solidFill>
-                <a:latin typeface="微软雅黑" panose="020B0503020204020204" charset="-122"/>
-                <a:ea typeface="微软雅黑" panose="020B0503020204020204" charset="-122"/>
-              </a:rPr>
-              <a:t>，连续学习式适应方法最高可带来 </a:t>
-            </a:r>
-            <a:r>
-              <a:rPr lang="en-US" altLang="zh-CN" b="1" kern="0" dirty="0">
-                <a:solidFill>
-                  <a:srgbClr val="FFC000"/>
-                </a:solidFill>
-                <a:latin typeface="微软雅黑" panose="020B0503020204020204" charset="-122"/>
-                <a:ea typeface="微软雅黑" panose="020B0503020204020204" charset="-122"/>
-              </a:rPr>
-              <a:t>27% F1-score </a:t>
-            </a:r>
-            <a:r>
-              <a:rPr lang="zh-CN" altLang="en-US" b="1" kern="0" dirty="0">
-                <a:solidFill>
-                  <a:srgbClr val="FFC000"/>
-                </a:solidFill>
-                <a:latin typeface="微软雅黑" panose="020B0503020204020204" charset="-122"/>
-                <a:ea typeface="微软雅黑" panose="020B0503020204020204" charset="-122"/>
-              </a:rPr>
-              <a:t>提升</a:t>
-            </a:r>
-            <a:r>
-              <a:rPr lang="zh-CN" altLang="en-US" b="1" kern="0" dirty="0">
-                <a:solidFill>
-                  <a:prstClr val="white"/>
-                </a:solidFill>
-                <a:latin typeface="微软雅黑" panose="020B0503020204020204" charset="-122"/>
-                <a:ea typeface="微软雅黑" panose="020B0503020204020204" charset="-122"/>
-              </a:rPr>
-              <a:t>。</a:t>
-            </a:r>
-            <a:endParaRPr kumimoji="0" lang="zh-CN" altLang="en-US" b="1" i="0" u="none" strike="noStrike" kern="0" cap="none" spc="0" normalizeH="0" baseline="0" noProof="0" dirty="0">
+              <a:t>27%</a:t>
+            </a:r>
+            <a:endParaRPr kumimoji="0" lang="zh-CN" altLang="en-US" sz="2000" b="1" i="0" u="none" strike="noStrike" kern="0" cap="none" spc="0" normalizeH="0" baseline="0" noProof="0" dirty="0">
               <a:ln>
                 <a:noFill/>
               </a:ln>
               <a:solidFill>
-                <a:schemeClr val="bg1"/>
+                <a:srgbClr val="FFC000"/>
               </a:solidFill>
               <a:effectLst/>
               <a:uLnTx/>
@@ -4109,7 +4015,7 @@
           <p:cNvPr id="54" name="文本框 19">
             <a:extLst>
               <a:ext uri="{FF2B5EF4-FFF2-40B4-BE49-F238E27FC236}">
-                <a16:creationId xmlns:a16="http://schemas.microsoft.com/office/drawing/2014/main" id="{07186F90-1D5C-4B0E-ADAB-4308D6D8C78D}"/>
+                <a16:creationId xmlns:a16="http://schemas.microsoft.com/office/drawing/2014/main" id="{D91EBB09-B358-1BC4-40DB-A1B425D1FACA}"/>
               </a:ext>
             </a:extLst>
           </p:cNvPr>
@@ -4118,7 +4024,7 @@
         </p:nvSpPr>
         <p:spPr>
           <a:xfrm>
-            <a:off x="440950" y="6491434"/>
+            <a:off x="440950" y="6534978"/>
             <a:ext cx="11398805" cy="307777"/>
           </a:xfrm>
           <a:prstGeom prst="rect">
@@ -4258,7 +4164,7 @@
           <p:cNvPr id="15" name="任意多边形: 形状 70">
             <a:extLst>
               <a:ext uri="{FF2B5EF4-FFF2-40B4-BE49-F238E27FC236}">
-                <a16:creationId xmlns:a16="http://schemas.microsoft.com/office/drawing/2014/main" id="{FFEFDD6E-A867-4970-9709-5B0F55C5E0E0}"/>
+                <a16:creationId xmlns:a16="http://schemas.microsoft.com/office/drawing/2014/main" id="{6BA57F0C-1E97-BB9E-F3F7-92C2FC9E7F3A}"/>
               </a:ext>
             </a:extLst>
           </p:cNvPr>
@@ -4406,27 +4312,7 @@
                 <a:latin typeface="微软雅黑" panose="020B0503020204020204" pitchFamily="34" charset="-122"/>
                 <a:ea typeface="微软雅黑" panose="020B0503020204020204" pitchFamily="34" charset="-122"/>
               </a:rPr>
-              <a:t>面向 </a:t>
-            </a:r>
-            <a:r>
-              <a:rPr lang="en-US" altLang="zh-CN" sz="2400" b="1" kern="0" dirty="0">
-                <a:solidFill>
-                  <a:prstClr val="white"/>
-                </a:solidFill>
-                <a:latin typeface="微软雅黑" panose="020B0503020204020204" pitchFamily="34" charset="-122"/>
-                <a:ea typeface="微软雅黑" panose="020B0503020204020204" pitchFamily="34" charset="-122"/>
-              </a:rPr>
-              <a:t>Normality Shift </a:t>
-            </a:r>
-            <a:r>
-              <a:rPr lang="zh-CN" altLang="en-US" sz="2400" b="1" kern="0" dirty="0">
-                <a:solidFill>
-                  <a:prstClr val="white"/>
-                </a:solidFill>
-                <a:latin typeface="微软雅黑" panose="020B0503020204020204" pitchFamily="34" charset="-122"/>
-                <a:ea typeface="微软雅黑" panose="020B0503020204020204" pitchFamily="34" charset="-122"/>
-              </a:rPr>
-              <a:t>的云攻击日志异常检测基准</a:t>
+              <a:t>面向常态漂移的云系统攻击检测评估与提升方法</a:t>
             </a:r>
             <a:endParaRPr kumimoji="0" lang="zh-CN" altLang="en-US" sz="2400" b="1" i="0" u="none" strike="noStrike" kern="0" cap="none" spc="0" normalizeH="0" baseline="0" noProof="0" dirty="0">
               <a:ln>
@@ -4450,7 +4336,7 @@
           <p:cNvPr id="16" name="文本框 20">
             <a:extLst>
               <a:ext uri="{FF2B5EF4-FFF2-40B4-BE49-F238E27FC236}">
-                <a16:creationId xmlns:a16="http://schemas.microsoft.com/office/drawing/2014/main" id="{60836EBD-2C7F-4FA0-9832-D23B5FDCBDF1}"/>
+                <a16:creationId xmlns:a16="http://schemas.microsoft.com/office/drawing/2014/main" id="{54456891-D7DD-F111-72C7-D09229A1545F}"/>
               </a:ext>
             </a:extLst>
           </p:cNvPr>
@@ -4459,7 +4345,7 @@
         </p:nvSpPr>
         <p:spPr>
           <a:xfrm>
-            <a:off x="396789" y="4951396"/>
+            <a:off x="396789" y="4829071"/>
             <a:ext cx="4075748" cy="584775"/>
           </a:xfrm>
           <a:prstGeom prst="rect">
@@ -4480,7 +4366,7 @@
                 <a:latin typeface="微软雅黑" panose="020B0503020204020204" charset="-122"/>
                 <a:ea typeface="微软雅黑" panose="020B0503020204020204" charset="-122"/>
               </a:rPr>
-              <a:t>真实云系统会持续发生</a:t>
+              <a:t>云系统会持续</a:t>
             </a:r>
             <a:r>
               <a:rPr lang="zh-CN" altLang="en-US" sz="1600" b="1" dirty="0">
@@ -4491,7 +4377,7 @@
                 <a:latin typeface="微软雅黑" panose="020B0503020204020204" charset="-122"/>
                 <a:ea typeface="微软雅黑" panose="020B0503020204020204" charset="-122"/>
               </a:rPr>
-              <a:t>应用、版本和架构变化</a:t>
+              <a:t>应用、版本和系统架构变化</a:t>
             </a:r>
             <a:r>
               <a:rPr lang="zh-CN" altLang="en-US" sz="1600" b="1" dirty="0">
@@ -4499,7 +4385,7 @@
                 <a:latin typeface="微软雅黑" panose="020B0503020204020204" charset="-122"/>
                 <a:ea typeface="微软雅黑" panose="020B0503020204020204" charset="-122"/>
               </a:rPr>
-              <a:t>，导致</a:t>
+              <a:t>，导致数据</a:t>
             </a:r>
             <a:r>
               <a:rPr lang="zh-CN" altLang="en-US" sz="1600" b="1" dirty="0">
@@ -4537,7 +4423,7 @@
                 <a:latin typeface="微软雅黑" panose="020B0503020204020204" charset="-122"/>
                 <a:ea typeface="微软雅黑" panose="020B0503020204020204" charset="-122"/>
               </a:rPr>
-              <a:t>不一致。</a:t>
+              <a:t>不一致</a:t>
             </a:r>
             <a:endParaRPr lang="zh-CN" altLang="en-US" sz="1600" b="1" dirty="0">
               <a:solidFill>
@@ -4555,7 +4441,7 @@
           <p:cNvPr id="17" name="文本框 20">
             <a:extLst>
               <a:ext uri="{FF2B5EF4-FFF2-40B4-BE49-F238E27FC236}">
-                <a16:creationId xmlns:a16="http://schemas.microsoft.com/office/drawing/2014/main" id="{2E3D9246-7219-4A41-BDD6-E4B20AC4E46A}"/>
+                <a16:creationId xmlns:a16="http://schemas.microsoft.com/office/drawing/2014/main" id="{941FF367-8695-0E7A-BD8F-21A0DE791E85}"/>
               </a:ext>
             </a:extLst>
           </p:cNvPr>
@@ -4585,7 +4471,7 @@
                 <a:latin typeface="微软雅黑" panose="020B0503020204020204" charset="-122"/>
                 <a:ea typeface="微软雅黑" panose="020B0503020204020204" charset="-122"/>
               </a:rPr>
-              <a:t>不同漂移场景下，正常日志分布明显</a:t>
+              <a:t>不同漂移场景下，日志分布明显</a:t>
             </a:r>
             <a:r>
               <a:rPr lang="zh-CN" altLang="en-US" sz="1600" b="1" dirty="0">
@@ -4623,7 +4509,7 @@
                 <a:latin typeface="微软雅黑" panose="020B0503020204020204" charset="-122"/>
                 <a:ea typeface="微软雅黑" panose="020B0503020204020204" charset="-122"/>
               </a:rPr>
-              <a:t>为异常。</a:t>
+              <a:t>为异常</a:t>
             </a:r>
           </a:p>
         </p:txBody>
@@ -4633,7 +4519,7 @@
           <p:cNvPr id="18" name="文本框 20">
             <a:extLst>
               <a:ext uri="{FF2B5EF4-FFF2-40B4-BE49-F238E27FC236}">
-                <a16:creationId xmlns:a16="http://schemas.microsoft.com/office/drawing/2014/main" id="{4BF191C2-7349-4DE3-BB9E-58939D7C48E3}"/>
+                <a16:creationId xmlns:a16="http://schemas.microsoft.com/office/drawing/2014/main" id="{FC6BE9EC-ED48-41DC-DA39-13CB4078C09C}"/>
               </a:ext>
             </a:extLst>
           </p:cNvPr>
@@ -4642,8 +4528,8 @@
         </p:nvSpPr>
         <p:spPr>
           <a:xfrm>
-            <a:off x="8032225" y="4988611"/>
-            <a:ext cx="3787277" cy="584775"/>
+            <a:off x="7851453" y="5075292"/>
+            <a:ext cx="4059384" cy="338554"/>
           </a:xfrm>
           <a:prstGeom prst="rect">
             <a:avLst/>
@@ -4663,7 +4549,7 @@
                 <a:latin typeface="微软雅黑" panose="020B0503020204020204" charset="-122"/>
                 <a:ea typeface="微软雅黑" panose="020B0503020204020204" charset="-122"/>
               </a:rPr>
-              <a:t>系统调用频率在</a:t>
+              <a:t>系统函数调用频率在</a:t>
             </a:r>
             <a:r>
               <a:rPr lang="zh-CN" altLang="en-US" sz="1600" b="1" dirty="0">
@@ -4676,33 +4562,11 @@
               </a:rPr>
               <a:t>漂移场景中显著变化</a:t>
             </a:r>
-            <a:r>
-              <a:rPr lang="zh-CN" altLang="en-US" sz="1600" b="1" dirty="0">
-                <a:effectLst/>
-                <a:latin typeface="微软雅黑" panose="020B0503020204020204" charset="-122"/>
-                <a:ea typeface="微软雅黑" panose="020B0503020204020204" charset="-122"/>
-              </a:rPr>
-              <a:t>，说明鲁棒模型需要</a:t>
-            </a:r>
-            <a:r>
-              <a:rPr lang="zh-CN" altLang="en-US" sz="1600" b="1" dirty="0">
-                <a:solidFill>
-                  <a:srgbClr val="C00000"/>
-                </a:solidFill>
-                <a:effectLst/>
-                <a:latin typeface="微软雅黑" panose="020B0503020204020204" charset="-122"/>
-                <a:ea typeface="微软雅黑" panose="020B0503020204020204" charset="-122"/>
-              </a:rPr>
-              <a:t>适应动态业务分布</a:t>
-            </a:r>
-            <a:r>
-              <a:rPr lang="zh-CN" altLang="en-US" sz="1600" b="1" dirty="0">
-                <a:effectLst/>
-                <a:latin typeface="微软雅黑" panose="020B0503020204020204" charset="-122"/>
-                <a:ea typeface="微软雅黑" panose="020B0503020204020204" charset="-122"/>
-              </a:rPr>
-              <a:t>。</a:t>
-            </a:r>
+            <a:endParaRPr lang="zh-CN" altLang="en-US" sz="1600" b="1" dirty="0">
+              <a:effectLst/>
+              <a:latin typeface="微软雅黑" panose="020B0503020204020204" charset="-122"/>
+              <a:ea typeface="微软雅黑" panose="020B0503020204020204" charset="-122"/>
+            </a:endParaRPr>
           </a:p>
         </p:txBody>
       </p:sp>
@@ -4711,7 +4575,7 @@
           <p:cNvPr id="19" name="图片 18">
             <a:extLst>
               <a:ext uri="{FF2B5EF4-FFF2-40B4-BE49-F238E27FC236}">
-                <a16:creationId xmlns:a16="http://schemas.microsoft.com/office/drawing/2014/main" id="{CCD7AA66-D0E6-4C09-B5EE-37BC927C06F4}"/>
+                <a16:creationId xmlns:a16="http://schemas.microsoft.com/office/drawing/2014/main" id="{B52CCECB-9B93-E54E-D967-5F832E54B3EE}"/>
               </a:ext>
             </a:extLst>
           </p:cNvPr>
@@ -4728,7 +4592,7 @@
         </p:blipFill>
         <p:spPr>
           <a:xfrm>
-            <a:off x="345595" y="2578992"/>
+            <a:off x="345595" y="2720085"/>
             <a:ext cx="4126942" cy="1940483"/>
           </a:xfrm>
           <a:prstGeom prst="rect">
@@ -4741,7 +4605,7 @@
           <p:cNvPr id="20" name="图片 19">
             <a:extLst>
               <a:ext uri="{FF2B5EF4-FFF2-40B4-BE49-F238E27FC236}">
-                <a16:creationId xmlns:a16="http://schemas.microsoft.com/office/drawing/2014/main" id="{599A8AA7-F397-407B-A25D-A08A20605209}"/>
+                <a16:creationId xmlns:a16="http://schemas.microsoft.com/office/drawing/2014/main" id="{79CCB553-DFD4-BFA9-3392-F0390727EEB1}"/>
               </a:ext>
             </a:extLst>
           </p:cNvPr>
@@ -4758,7 +4622,7 @@
         </p:blipFill>
         <p:spPr>
           <a:xfrm>
-            <a:off x="4950656" y="2427870"/>
+            <a:off x="4950656" y="2416984"/>
             <a:ext cx="2379391" cy="2254160"/>
           </a:xfrm>
           <a:prstGeom prst="rect">
@@ -4771,7 +4635,7 @@
           <p:cNvPr id="21" name="图片 20">
             <a:extLst>
               <a:ext uri="{FF2B5EF4-FFF2-40B4-BE49-F238E27FC236}">
-                <a16:creationId xmlns:a16="http://schemas.microsoft.com/office/drawing/2014/main" id="{B90AAD15-B40D-43A4-8867-9CAD1D935302}"/>
+                <a16:creationId xmlns:a16="http://schemas.microsoft.com/office/drawing/2014/main" id="{EA292782-7911-33E7-84B9-D8FCCA088377}"/>
               </a:ext>
             </a:extLst>
           </p:cNvPr>
@@ -4788,7 +4652,7 @@
         </p:blipFill>
         <p:spPr>
           <a:xfrm>
-            <a:off x="7942789" y="2413816"/>
+            <a:off x="7942789" y="2402930"/>
             <a:ext cx="3876713" cy="2574795"/>
           </a:xfrm>
           <a:prstGeom prst="rect">
@@ -4801,7 +4665,7 @@
           <p:cNvPr id="13" name="矩形: 圆角 28">
             <a:extLst>
               <a:ext uri="{FF2B5EF4-FFF2-40B4-BE49-F238E27FC236}">
-                <a16:creationId xmlns:a16="http://schemas.microsoft.com/office/drawing/2014/main" id="{0F0D9322-354A-4870-A3DA-B02281DF8F58}"/>
+                <a16:creationId xmlns:a16="http://schemas.microsoft.com/office/drawing/2014/main" id="{92A3DEF4-39D9-4755-4122-03F89EBD35DD}"/>
               </a:ext>
             </a:extLst>
           </p:cNvPr>
@@ -4881,7 +4745,7 @@
           <p:cNvPr id="14" name="文本框 7">
             <a:extLst>
               <a:ext uri="{FF2B5EF4-FFF2-40B4-BE49-F238E27FC236}">
-                <a16:creationId xmlns:a16="http://schemas.microsoft.com/office/drawing/2014/main" id="{88C49DF7-ABD8-45EA-B60D-BE4AA5AB5762}"/>
+                <a16:creationId xmlns:a16="http://schemas.microsoft.com/office/drawing/2014/main" id="{9920B3EE-DB2C-4AC5-0E90-9BF854A8B8A5}"/>
               </a:ext>
             </a:extLst>
           </p:cNvPr>
@@ -4891,7 +4755,7 @@
         <p:spPr>
           <a:xfrm>
             <a:off x="522339" y="1510773"/>
-            <a:ext cx="11160000" cy="799706"/>
+            <a:ext cx="11160000" cy="799642"/>
           </a:xfrm>
           <a:prstGeom prst="rect">
             <a:avLst/>
@@ -4937,17 +4801,17 @@
                 <a:latin typeface="微软雅黑" panose="020B0503020204020204" charset="-122"/>
                 <a:ea typeface="微软雅黑" panose="020B0503020204020204" charset="-122"/>
               </a:rPr>
-              <a:t>现有数据集难以覆盖云原生系统中的应用、容器运行时、</a:t>
-            </a:r>
-            <a:r>
-              <a:rPr lang="en-US" altLang="zh-CN" sz="2000" b="1" dirty="0">
-                <a:solidFill>
-                  <a:prstClr val="black"/>
+              <a:t>现有云原生系统</a:t>
+            </a:r>
+            <a:r>
+              <a:rPr lang="zh-CN" altLang="en-US" sz="2000" b="1" dirty="0">
+                <a:solidFill>
+                  <a:srgbClr val="C00000"/>
                 </a:solidFill>
                 <a:latin typeface="微软雅黑" panose="020B0503020204020204" charset="-122"/>
                 <a:ea typeface="微软雅黑" panose="020B0503020204020204" charset="-122"/>
               </a:rPr>
-              <a:t>Kubernetes </a:t>
+              <a:t>频繁更新（应用、版本、系统架构）</a:t>
             </a:r>
             <a:r>
               <a:rPr lang="zh-CN" altLang="en-US" sz="2000" b="1" dirty="0">
@@ -4957,7 +4821,7 @@
                 <a:latin typeface="微软雅黑" panose="020B0503020204020204" charset="-122"/>
                 <a:ea typeface="微软雅黑" panose="020B0503020204020204" charset="-122"/>
               </a:rPr>
-              <a:t>组件等全系统攻击面。云原生系统持续演化导致</a:t>
+              <a:t>导致日志分布发生</a:t>
             </a:r>
             <a:r>
               <a:rPr lang="zh-CN" altLang="en-US" sz="2000" b="1" dirty="0">
@@ -4967,7 +4831,7 @@
                 <a:latin typeface="微软雅黑" panose="020B0503020204020204" charset="-122"/>
                 <a:ea typeface="微软雅黑" panose="020B0503020204020204" charset="-122"/>
               </a:rPr>
-              <a:t>日志分布常态漂移</a:t>
+              <a:t>常态漂移</a:t>
             </a:r>
             <a:r>
               <a:rPr lang="zh-CN" altLang="en-US" sz="2000" b="1" dirty="0">
@@ -4977,7 +4841,7 @@
                 <a:latin typeface="微软雅黑" panose="020B0503020204020204" charset="-122"/>
                 <a:ea typeface="微软雅黑" panose="020B0503020204020204" charset="-122"/>
               </a:rPr>
-              <a:t>，使得现有攻击检测系统性能</a:t>
+              <a:t>，现有基于日志的攻击检测方法在漂移场景下</a:t>
             </a:r>
             <a:r>
               <a:rPr lang="zh-CN" altLang="en-US" sz="2000" b="1" dirty="0">
@@ -4987,7 +4851,27 @@
                 <a:latin typeface="微软雅黑" panose="020B0503020204020204" charset="-122"/>
                 <a:ea typeface="微软雅黑" panose="020B0503020204020204" charset="-122"/>
               </a:rPr>
-              <a:t>显著下降。</a:t>
+              <a:t>性能大幅下降</a:t>
+            </a:r>
+            <a:r>
+              <a:rPr lang="zh-CN" altLang="en-US" sz="2000" b="1" dirty="0">
+                <a:solidFill>
+                  <a:prstClr val="black"/>
+                </a:solidFill>
+                <a:latin typeface="微软雅黑" panose="020B0503020204020204" charset="-122"/>
+                <a:ea typeface="微软雅黑" panose="020B0503020204020204" charset="-122"/>
+              </a:rPr>
+              <a:t>，但缺乏针对多种不同漂移类型</a:t>
+            </a:r>
+            <a:r>
+              <a:rPr lang="zh-CN" altLang="en-US" sz="2000" b="1" dirty="0">
+                <a:solidFill>
+                  <a:srgbClr val="C00000"/>
+                </a:solidFill>
+                <a:latin typeface="微软雅黑" panose="020B0503020204020204" charset="-122"/>
+                <a:ea typeface="微软雅黑" panose="020B0503020204020204" charset="-122"/>
+              </a:rPr>
+              <a:t>影响理解和解决方案</a:t>
             </a:r>
           </a:p>
         </p:txBody>
@@ -4995,7 +4879,7 @@
     </p:spTree>
     <p:extLst>
       <p:ext uri="{BB962C8B-B14F-4D97-AF65-F5344CB8AC3E}">
-        <p14:creationId xmlns:p14="http://schemas.microsoft.com/office/powerpoint/2010/main" val="2633355142"/>
+        <p14:creationId xmlns:p14="http://schemas.microsoft.com/office/powerpoint/2010/main" val="2359335077"/>
       </p:ext>
     </p:extLst>
   </p:cSld>
